--- a/docs/pptx/carbo/jx-carbo-linsubhr-egfrdisc-death.pptx
+++ b/docs/pptx/carbo/jx-carbo-linsubhr-egfrdisc-death.pptx
@@ -4868,7 +4868,7 @@
           <p:spPr>
             <a:xfrm>
               <a:off x="817517" y="1896563"/>
-              <a:ext cx="4749210" cy="82021"/>
+              <a:ext cx="5600608" cy="82021"/>
             </a:xfrm>
             <a:prstGeom prst="rect">
               <a:avLst/>
@@ -4900,7 +4900,7 @@
                   <a:latin typeface="Helvetica"/>
                   <a:cs typeface="Helvetica"/>
                 </a:rPr>
-                <a:t>HR per 1 mL/min: 0.94 (0.91-0.97)  |  per IQR (Δ = 23.1): 0.22 (0.11-0.45)  |  IQR: [-12.6, 10.5]</a:t>
+                <a:t>HR per 10 mL/min decline: 1.92 (1.42-2.59)  |  per IQR decline (Δ = 23.1): 4.50 (2.23-9.06)  |  IQR: [-12.6, 10.5]</a:t>
               </a:r>
             </a:p>
           </p:txBody>

--- a/docs/pptx/carbo/jx-carbo-linsubhr-egfrdisc-death.pptx
+++ b/docs/pptx/carbo/jx-carbo-linsubhr-egfrdisc-death.pptx
@@ -4868,7 +4868,7 @@
           <p:spPr>
             <a:xfrm>
               <a:off x="817517" y="1896563"/>
-              <a:ext cx="5600608" cy="82021"/>
+              <a:ext cx="6210513" cy="82021"/>
             </a:xfrm>
             <a:prstGeom prst="rect">
               <a:avLst/>
@@ -4900,7 +4900,7 @@
                   <a:latin typeface="Helvetica"/>
                   <a:cs typeface="Helvetica"/>
                 </a:rPr>
-                <a:t>HR per 10 mL/min decline: 1.92 (1.42-2.59)  |  per IQR decline (Δ = 23.1): 4.50 (2.23-9.06)  |  IQR: [-12.6, 10.5]</a:t>
+                <a:t>HR per 10 mL/min decline: 1.92 (1.42-2.59), p = &lt;0.001  |  per IQR decline (Δ = 23.1): 4.50 (2.23-9.06)  |  IQR: [-12.6, 10.5]</a:t>
               </a:r>
             </a:p>
           </p:txBody>

--- a/docs/pptx/carbo/jx-carbo-linsubhr-egfrdisc-death.pptx
+++ b/docs/pptx/carbo/jx-carbo-linsubhr-egfrdisc-death.pptx
@@ -4868,7 +4868,7 @@
           <p:spPr>
             <a:xfrm>
               <a:off x="817517" y="1896563"/>
-              <a:ext cx="6210513" cy="82021"/>
+              <a:ext cx="6874276" cy="82021"/>
             </a:xfrm>
             <a:prstGeom prst="rect">
               <a:avLst/>
@@ -4900,7 +4900,7 @@
                   <a:latin typeface="Helvetica"/>
                   <a:cs typeface="Helvetica"/>
                 </a:rPr>
-                <a:t>HR per 10 mL/min decline: 1.92 (1.42-2.59), p = &lt;0.001  |  per IQR decline (Δ = 23.1): 4.50 (2.23-9.06)  |  IQR: [-12.6, 10.5]</a:t>
+                <a:t>HR per 10 mL/min decline: 1.92 (1.42-2.59), p_Bonf = &lt;0.001 (n = 6)  |  per IQR decline (Δ = 23.1): 4.50 (2.23-9.06)  |  IQR: [-12.6, 10.5]</a:t>
               </a:r>
             </a:p>
           </p:txBody>
